--- a/05-Poster/Poster.pptx
+++ b/05-Poster/Poster.pptx
@@ -222,7 +222,7 @@
           <a:p>
             <a:fld id="{40B2206F-7194-4E11-805A-5295AF5385CE}" type="datetimeFigureOut">
               <a:rPr lang="en-GB" smtClean="0"/>
-              <a:t>15/03/2026</a:t>
+              <a:t>19/04/2026</a:t>
             </a:fld>
             <a:endParaRPr lang="en-GB"/>
           </a:p>
@@ -621,7 +621,7 @@
           <a:p>
             <a:fld id="{1381CABE-BD8A-4ED8-BE60-32148880DEC7}" type="datetimeFigureOut">
               <a:rPr lang="en-GB" smtClean="0"/>
-              <a:t>15/03/2026</a:t>
+              <a:t>19/04/2026</a:t>
             </a:fld>
             <a:endParaRPr lang="en-GB"/>
           </a:p>
@@ -791,7 +791,7 @@
           <a:p>
             <a:fld id="{1381CABE-BD8A-4ED8-BE60-32148880DEC7}" type="datetimeFigureOut">
               <a:rPr lang="en-GB" smtClean="0"/>
-              <a:t>15/03/2026</a:t>
+              <a:t>19/04/2026</a:t>
             </a:fld>
             <a:endParaRPr lang="en-GB"/>
           </a:p>
@@ -971,7 +971,7 @@
           <a:p>
             <a:fld id="{1381CABE-BD8A-4ED8-BE60-32148880DEC7}" type="datetimeFigureOut">
               <a:rPr lang="en-GB" smtClean="0"/>
-              <a:t>15/03/2026</a:t>
+              <a:t>19/04/2026</a:t>
             </a:fld>
             <a:endParaRPr lang="en-GB"/>
           </a:p>
@@ -1141,7 +1141,7 @@
           <a:p>
             <a:fld id="{1381CABE-BD8A-4ED8-BE60-32148880DEC7}" type="datetimeFigureOut">
               <a:rPr lang="en-GB" smtClean="0"/>
-              <a:t>15/03/2026</a:t>
+              <a:t>19/04/2026</a:t>
             </a:fld>
             <a:endParaRPr lang="en-GB"/>
           </a:p>
@@ -1385,7 +1385,7 @@
           <a:p>
             <a:fld id="{1381CABE-BD8A-4ED8-BE60-32148880DEC7}" type="datetimeFigureOut">
               <a:rPr lang="en-GB" smtClean="0"/>
-              <a:t>15/03/2026</a:t>
+              <a:t>19/04/2026</a:t>
             </a:fld>
             <a:endParaRPr lang="en-GB"/>
           </a:p>
@@ -1617,7 +1617,7 @@
           <a:p>
             <a:fld id="{1381CABE-BD8A-4ED8-BE60-32148880DEC7}" type="datetimeFigureOut">
               <a:rPr lang="en-GB" smtClean="0"/>
-              <a:t>15/03/2026</a:t>
+              <a:t>19/04/2026</a:t>
             </a:fld>
             <a:endParaRPr lang="en-GB"/>
           </a:p>
@@ -1984,7 +1984,7 @@
           <a:p>
             <a:fld id="{1381CABE-BD8A-4ED8-BE60-32148880DEC7}" type="datetimeFigureOut">
               <a:rPr lang="en-GB" smtClean="0"/>
-              <a:t>15/03/2026</a:t>
+              <a:t>19/04/2026</a:t>
             </a:fld>
             <a:endParaRPr lang="en-GB"/>
           </a:p>
@@ -2102,7 +2102,7 @@
           <a:p>
             <a:fld id="{1381CABE-BD8A-4ED8-BE60-32148880DEC7}" type="datetimeFigureOut">
               <a:rPr lang="en-GB" smtClean="0"/>
-              <a:t>15/03/2026</a:t>
+              <a:t>19/04/2026</a:t>
             </a:fld>
             <a:endParaRPr lang="en-GB"/>
           </a:p>
@@ -2197,7 +2197,7 @@
           <a:p>
             <a:fld id="{1381CABE-BD8A-4ED8-BE60-32148880DEC7}" type="datetimeFigureOut">
               <a:rPr lang="en-GB" smtClean="0"/>
-              <a:t>15/03/2026</a:t>
+              <a:t>19/04/2026</a:t>
             </a:fld>
             <a:endParaRPr lang="en-GB"/>
           </a:p>
@@ -2474,7 +2474,7 @@
           <a:p>
             <a:fld id="{1381CABE-BD8A-4ED8-BE60-32148880DEC7}" type="datetimeFigureOut">
               <a:rPr lang="en-GB" smtClean="0"/>
-              <a:t>15/03/2026</a:t>
+              <a:t>19/04/2026</a:t>
             </a:fld>
             <a:endParaRPr lang="en-GB"/>
           </a:p>
@@ -2731,7 +2731,7 @@
           <a:p>
             <a:fld id="{1381CABE-BD8A-4ED8-BE60-32148880DEC7}" type="datetimeFigureOut">
               <a:rPr lang="en-GB" smtClean="0"/>
-              <a:t>15/03/2026</a:t>
+              <a:t>19/04/2026</a:t>
             </a:fld>
             <a:endParaRPr lang="en-GB"/>
           </a:p>
@@ -2944,7 +2944,7 @@
           <a:p>
             <a:fld id="{1381CABE-BD8A-4ED8-BE60-32148880DEC7}" type="datetimeFigureOut">
               <a:rPr lang="en-GB" smtClean="0"/>
-              <a:t>15/03/2026</a:t>
+              <a:t>19/04/2026</a:t>
             </a:fld>
             <a:endParaRPr lang="en-GB"/>
           </a:p>
@@ -3363,8 +3363,8 @@
         </p:nvSpPr>
         <p:spPr>
           <a:xfrm>
-            <a:off x="1306486" y="3859697"/>
-            <a:ext cx="8632969" cy="14106754"/>
+            <a:off x="1306486" y="2778351"/>
+            <a:ext cx="8632969" cy="14995300"/>
           </a:xfrm>
           <a:prstGeom prst="roundRect">
             <a:avLst>
@@ -3523,7 +3523,7 @@
         </p:blipFill>
         <p:spPr>
           <a:xfrm>
-            <a:off x="18297279" y="18184685"/>
+            <a:off x="18360743" y="18260885"/>
             <a:ext cx="3322215" cy="2906938"/>
           </a:xfrm>
           <a:prstGeom prst="rect">
@@ -3559,7 +3559,7 @@
         </p:blipFill>
         <p:spPr>
           <a:xfrm>
-            <a:off x="21329151" y="18486726"/>
+            <a:off x="21392615" y="18562926"/>
             <a:ext cx="1760219" cy="1760219"/>
           </a:xfrm>
           <a:prstGeom prst="rect">
@@ -3595,7 +3595,7 @@
         </p:blipFill>
         <p:spPr>
           <a:xfrm>
-            <a:off x="23089370" y="18184685"/>
+            <a:off x="23152834" y="18241835"/>
             <a:ext cx="2824332" cy="2683115"/>
           </a:xfrm>
           <a:prstGeom prst="rect">
@@ -3631,7 +3631,7 @@
         </p:blipFill>
         <p:spPr>
           <a:xfrm>
-            <a:off x="25913702" y="18486726"/>
+            <a:off x="25977166" y="18543876"/>
             <a:ext cx="3055021" cy="1868814"/>
           </a:xfrm>
           <a:prstGeom prst="rect">
@@ -3653,8 +3653,8 @@
         </p:nvSpPr>
         <p:spPr>
           <a:xfrm>
-            <a:off x="6840314" y="616407"/>
-            <a:ext cx="16594577" cy="2923877"/>
+            <a:off x="1306486" y="804749"/>
+            <a:ext cx="22128405" cy="1200329"/>
           </a:xfrm>
           <a:prstGeom prst="rect">
             <a:avLst/>
@@ -3674,18 +3674,11 @@
           </a:bodyPr>
           <a:lstStyle/>
           <a:p>
-            <a:pPr algn="ctr"/>
-            <a:r>
-              <a:rPr lang="en-GB" sz="9600" b="1" dirty="0">
-                <a:latin typeface="Quicksand" pitchFamily="2" charset="0"/>
-              </a:rPr>
-              <a:t>Archery Scorekeeper </a:t>
-            </a:r>
-            <a:r>
-              <a:rPr lang="en-GB" sz="8800" b="1" dirty="0">
-                <a:latin typeface="Quicksand" pitchFamily="2" charset="0"/>
-              </a:rPr>
-              <a:t>and Club Management Tool</a:t>
+            <a:r>
+              <a:rPr lang="en-GB" sz="7200" b="1" dirty="0">
+                <a:latin typeface="Quicksand" pitchFamily="2" charset="0"/>
+              </a:rPr>
+              <a:t>Archery Scorekeeper and Club Management Tool</a:t>
             </a:r>
           </a:p>
         </p:txBody>
@@ -3718,8 +3711,8 @@
         </p:blipFill>
         <p:spPr>
           <a:xfrm>
-            <a:off x="18861367" y="16718130"/>
-            <a:ext cx="4573527" cy="1466553"/>
+            <a:off x="25053913" y="16928057"/>
+            <a:ext cx="3978274" cy="1275678"/>
           </a:xfrm>
           <a:prstGeom prst="rect">
             <a:avLst/>
@@ -3754,8 +3747,8 @@
         </p:blipFill>
         <p:spPr>
           <a:xfrm>
-            <a:off x="23998982" y="16699143"/>
-            <a:ext cx="5076752" cy="1307266"/>
+            <a:off x="16831644" y="16803304"/>
+            <a:ext cx="4538250" cy="1168601"/>
           </a:xfrm>
           <a:prstGeom prst="rect">
             <a:avLst/>
@@ -3776,8 +3769,8 @@
         </p:nvSpPr>
         <p:spPr>
           <a:xfrm>
-            <a:off x="1510050" y="4096230"/>
-            <a:ext cx="8225840" cy="6555641"/>
+            <a:off x="1510050" y="3335639"/>
+            <a:ext cx="8225840" cy="13880723"/>
           </a:xfrm>
           <a:prstGeom prst="rect">
             <a:avLst/>
@@ -3792,19 +3785,19 @@
           <a:p>
             <a:pPr algn="ctr"/>
             <a:r>
-              <a:rPr lang="en-GB" sz="2800" dirty="0">
+              <a:rPr lang="en-GB" sz="3200" dirty="0">
                 <a:latin typeface="Quicksand" pitchFamily="2" charset="0"/>
               </a:rPr>
               <a:t>Archery clubs are largely volunteer-led. The </a:t>
             </a:r>
             <a:r>
-              <a:rPr lang="en-GB" sz="2800" b="1" dirty="0">
+              <a:rPr lang="en-GB" sz="3200" b="1" dirty="0">
                 <a:latin typeface="Quicksand" pitchFamily="2" charset="0"/>
               </a:rPr>
               <a:t>Archery Scorekeeper</a:t>
             </a:r>
             <a:r>
-              <a:rPr lang="en-GB" sz="2800" dirty="0">
+              <a:rPr lang="en-GB" sz="3200" dirty="0">
                 <a:latin typeface="Quicksand" pitchFamily="2" charset="0"/>
               </a:rPr>
               <a:t> system acts as a digital secretary to assist these volunteers with the management of the club, handling archers’ score submissions and membership records.</a:t>
@@ -3812,75 +3805,144 @@
           </a:p>
           <a:p>
             <a:pPr algn="ctr"/>
-            <a:endParaRPr lang="en-GB" sz="2800" dirty="0">
+            <a:endParaRPr lang="en-GB" sz="3200" dirty="0">
               <a:latin typeface="Quicksand" pitchFamily="2" charset="0"/>
             </a:endParaRPr>
           </a:p>
           <a:p>
             <a:pPr algn="ctr"/>
             <a:r>
-              <a:rPr lang="en-GB" sz="2800" dirty="0">
+              <a:rPr lang="en-GB" sz="3200" dirty="0">
                 <a:latin typeface="Quicksand" pitchFamily="2" charset="0"/>
               </a:rPr>
               <a:t>With the traditional pen and paper or Excel spreadsheet method of managing scores, club Records Officers can spend </a:t>
             </a:r>
             <a:r>
-              <a:rPr lang="en-GB" sz="2800" b="1" dirty="0">
+              <a:rPr lang="en-GB" sz="3200" b="1" dirty="0">
                 <a:latin typeface="Quicksand" pitchFamily="2" charset="0"/>
               </a:rPr>
               <a:t>hours</a:t>
             </a:r>
             <a:r>
-              <a:rPr lang="en-GB" sz="2800" dirty="0">
-                <a:latin typeface="Quicksand" pitchFamily="2" charset="0"/>
-              </a:rPr>
-              <a:t> staring at handicap tables and cross-referencing values against classification tables. This system </a:t>
-            </a:r>
-            <a:r>
-              <a:rPr lang="en-GB" sz="2800" b="1" dirty="0">
+              <a:rPr lang="en-GB" sz="3200" dirty="0">
+                <a:latin typeface="Quicksand" pitchFamily="2" charset="0"/>
+              </a:rPr>
+              <a:t> staring at handicap tables and cross-referencing values against classification tables. </a:t>
+            </a:r>
+          </a:p>
+          <a:p>
+            <a:pPr algn="ctr"/>
+            <a:endParaRPr lang="en-GB" sz="3200" dirty="0">
+              <a:latin typeface="Quicksand" pitchFamily="2" charset="0"/>
+            </a:endParaRPr>
+          </a:p>
+          <a:p>
+            <a:pPr algn="ctr"/>
+            <a:r>
+              <a:rPr lang="en-GB" sz="3200" dirty="0">
+                <a:latin typeface="Quicksand" pitchFamily="2" charset="0"/>
+              </a:rPr>
+              <a:t>This system </a:t>
+            </a:r>
+            <a:r>
+              <a:rPr lang="en-GB" sz="3200" b="1" dirty="0">
                 <a:latin typeface="Quicksand" pitchFamily="2" charset="0"/>
               </a:rPr>
               <a:t>automates this process</a:t>
             </a:r>
             <a:r>
-              <a:rPr lang="en-GB" sz="2800" dirty="0">
-                <a:latin typeface="Quicksand" pitchFamily="2" charset="0"/>
-              </a:rPr>
-              <a:t> by passing the user submitted scores directly to a Flask container to perform the </a:t>
-            </a:r>
-            <a:r>
-              <a:rPr lang="en-GB" sz="2800" b="1" dirty="0">
-                <a:latin typeface="Quicksand" pitchFamily="2" charset="0"/>
-              </a:rPr>
-              <a:t>domain-specific calculations</a:t>
-            </a:r>
-            <a:r>
-              <a:rPr lang="en-GB" sz="2800" dirty="0">
-                <a:latin typeface="Quicksand" pitchFamily="2" charset="0"/>
-              </a:rPr>
-              <a:t> and return the results </a:t>
-            </a:r>
-            <a:r>
-              <a:rPr lang="en-GB" sz="2800" b="1" dirty="0">
+              <a:rPr lang="en-GB" sz="3200" dirty="0">
+                <a:latin typeface="Quicksand" pitchFamily="2" charset="0"/>
+              </a:rPr>
+              <a:t> by passing the user submitted scores directly to a Python/Flask microservice to perform the domain-specific</a:t>
+            </a:r>
+            <a:r>
+              <a:rPr lang="en-GB" sz="3200" b="1" dirty="0">
+                <a:latin typeface="Quicksand" pitchFamily="2" charset="0"/>
+              </a:rPr>
+              <a:t> </a:t>
+            </a:r>
+            <a:r>
+              <a:rPr lang="en-GB" sz="3200" dirty="0">
+                <a:latin typeface="Quicksand" pitchFamily="2" charset="0"/>
+              </a:rPr>
+              <a:t>calculations and return the results </a:t>
+            </a:r>
+            <a:r>
+              <a:rPr lang="en-GB" sz="3200" b="1" dirty="0">
                 <a:latin typeface="Quicksand" pitchFamily="2" charset="0"/>
               </a:rPr>
               <a:t>instantly</a:t>
             </a:r>
             <a:r>
-              <a:rPr lang="en-GB" sz="2800" dirty="0">
+              <a:rPr lang="en-GB" sz="3200" dirty="0">
                 <a:latin typeface="Quicksand" pitchFamily="2" charset="0"/>
               </a:rPr>
               <a:t> to the archer.</a:t>
             </a:r>
           </a:p>
-        </p:txBody>
-      </p:sp>
-      <p:sp>
-        <p:nvSpPr>
-          <p:cNvPr id="15" name="Rectangle: Rounded Corners 14">
+          <a:p>
+            <a:pPr algn="ctr"/>
+            <a:endParaRPr lang="en-GB" sz="3200" dirty="0">
+              <a:latin typeface="Quicksand" pitchFamily="2" charset="0"/>
+            </a:endParaRPr>
+          </a:p>
+          <a:p>
+            <a:pPr algn="ctr"/>
+            <a:r>
+              <a:rPr lang="en-GB" sz="3200" dirty="0">
+                <a:latin typeface="Quicksand" pitchFamily="2" charset="0"/>
+              </a:rPr>
+              <a:t>Club Secretaries and Tournament Officers can manage their members </a:t>
+            </a:r>
+            <a:r>
+              <a:rPr lang="en-GB" sz="3200" b="1" dirty="0">
+                <a:latin typeface="Quicksand" pitchFamily="2" charset="0"/>
+              </a:rPr>
+              <a:t>emergency contact information</a:t>
+            </a:r>
+            <a:r>
+              <a:rPr lang="en-GB" sz="3200" dirty="0">
+                <a:latin typeface="Quicksand" pitchFamily="2" charset="0"/>
+              </a:rPr>
+              <a:t>, keeping their archers safe at and away from the club.</a:t>
+            </a:r>
+          </a:p>
+          <a:p>
+            <a:pPr algn="ctr"/>
+            <a:endParaRPr lang="en-GB" sz="3200" dirty="0">
+              <a:latin typeface="Quicksand" pitchFamily="2" charset="0"/>
+            </a:endParaRPr>
+          </a:p>
+          <a:p>
+            <a:pPr algn="ctr"/>
+            <a:r>
+              <a:rPr lang="en-GB" sz="3200" dirty="0">
+                <a:latin typeface="Quicksand" pitchFamily="2" charset="0"/>
+              </a:rPr>
+              <a:t>Integrated journals allow Coaches to </a:t>
+            </a:r>
+            <a:r>
+              <a:rPr lang="en-GB" sz="3200" b="1" dirty="0">
+                <a:latin typeface="Quicksand" pitchFamily="2" charset="0"/>
+              </a:rPr>
+              <a:t>track archers progress</a:t>
+            </a:r>
+            <a:r>
+              <a:rPr lang="en-GB" sz="3200" dirty="0">
+                <a:latin typeface="Quicksand" pitchFamily="2" charset="0"/>
+              </a:rPr>
+              <a:t> via written notes and data metrics.</a:t>
+            </a:r>
+          </a:p>
+        </p:txBody>
+      </p:sp>
+      <p:sp>
+        <p:nvSpPr>
+          <p:cNvPr id="20" name="Rectangle: Rounded Corners 19">
             <a:extLst>
               <a:ext uri="{FF2B5EF4-FFF2-40B4-BE49-F238E27FC236}">
-                <a16:creationId xmlns:a16="http://schemas.microsoft.com/office/drawing/2014/main" id="{913F8793-6CBA-9F12-E33C-C3963835E5AC}"/>
+                <a16:creationId xmlns:a16="http://schemas.microsoft.com/office/drawing/2014/main" id="{8E5BF521-322A-BA17-BE4B-3E72B04FA376}"/>
               </a:ext>
             </a:extLst>
           </p:cNvPr>
@@ -3889,12 +3951,12 @@
         </p:nvSpPr>
         <p:spPr>
           <a:xfrm>
-            <a:off x="10821120" y="3842325"/>
-            <a:ext cx="8632969" cy="12573762"/>
+            <a:off x="10884584" y="2778350"/>
+            <a:ext cx="18147603" cy="13655111"/>
           </a:xfrm>
           <a:prstGeom prst="roundRect">
             <a:avLst>
-              <a:gd name="adj" fmla="val 12430"/>
+              <a:gd name="adj" fmla="val 8275"/>
             </a:avLst>
           </a:prstGeom>
           <a:solidFill>
@@ -3940,69 +4002,6 @@
       </p:sp>
       <p:sp>
         <p:nvSpPr>
-          <p:cNvPr id="20" name="Rectangle: Rounded Corners 19">
-            <a:extLst>
-              <a:ext uri="{FF2B5EF4-FFF2-40B4-BE49-F238E27FC236}">
-                <a16:creationId xmlns:a16="http://schemas.microsoft.com/office/drawing/2014/main" id="{8E5BF521-322A-BA17-BE4B-3E72B04FA376}"/>
-              </a:ext>
-            </a:extLst>
-          </p:cNvPr>
-          <p:cNvSpPr/>
-          <p:nvPr/>
-        </p:nvSpPr>
-        <p:spPr>
-          <a:xfrm>
-            <a:off x="20335754" y="3933548"/>
-            <a:ext cx="8632969" cy="12482539"/>
-          </a:xfrm>
-          <a:prstGeom prst="roundRect">
-            <a:avLst>
-              <a:gd name="adj" fmla="val 12430"/>
-            </a:avLst>
-          </a:prstGeom>
-          <a:solidFill>
-            <a:schemeClr val="bg1"/>
-          </a:solidFill>
-          <a:ln w="76200">
-            <a:solidFill>
-              <a:srgbClr val="356DF1"/>
-            </a:solidFill>
-          </a:ln>
-          <a:effectLst>
-            <a:outerShdw blurRad="50800" dist="63500" dir="2700000" algn="tl" rotWithShape="0">
-              <a:srgbClr val="356DF1">
-                <a:alpha val="40000"/>
-              </a:srgbClr>
-            </a:outerShdw>
-          </a:effectLst>
-        </p:spPr>
-        <p:style>
-          <a:lnRef idx="2">
-            <a:schemeClr val="accent1">
-              <a:shade val="15000"/>
-            </a:schemeClr>
-          </a:lnRef>
-          <a:fillRef idx="1">
-            <a:schemeClr val="accent1"/>
-          </a:fillRef>
-          <a:effectRef idx="0">
-            <a:schemeClr val="accent1"/>
-          </a:effectRef>
-          <a:fontRef idx="minor">
-            <a:schemeClr val="lt1"/>
-          </a:fontRef>
-        </p:style>
-        <p:txBody>
-          <a:bodyPr rtlCol="0" anchor="ctr"/>
-          <a:lstStyle/>
-          <a:p>
-            <a:pPr algn="ctr"/>
-            <a:endParaRPr lang="en-GB"/>
-          </a:p>
-        </p:txBody>
-      </p:sp>
-      <p:sp>
-        <p:nvSpPr>
           <p:cNvPr id="21" name="TextBox 20">
             <a:extLst>
               <a:ext uri="{FF2B5EF4-FFF2-40B4-BE49-F238E27FC236}">
@@ -4015,8 +4014,8 @@
         </p:nvSpPr>
         <p:spPr>
           <a:xfrm>
-            <a:off x="11024682" y="4050619"/>
-            <a:ext cx="8225840" cy="12157174"/>
+            <a:off x="10991987" y="3157986"/>
+            <a:ext cx="8367437" cy="12895838"/>
           </a:xfrm>
           <a:prstGeom prst="rect">
             <a:avLst/>
@@ -4024,216 +4023,282 @@
           <a:noFill/>
         </p:spPr>
         <p:txBody>
-          <a:bodyPr wrap="square" rtlCol="0">
+          <a:bodyPr wrap="square" rtlCol="0" anchor="ctr">
             <a:spAutoFit/>
           </a:bodyPr>
           <a:lstStyle/>
           <a:p>
             <a:pPr algn="ctr"/>
             <a:r>
-              <a:rPr lang="en-GB" sz="2800" dirty="0">
-                <a:latin typeface="Quicksand" pitchFamily="2" charset="0"/>
-              </a:rPr>
-              <a:t>The system uses a multiple layer security methodology. Access to the website is governed by </a:t>
-            </a:r>
-            <a:r>
-              <a:rPr lang="en-GB" sz="2800" b="1" dirty="0">
+              <a:rPr lang="en-GB" sz="3200" b="1" dirty="0">
+                <a:latin typeface="Quicksand" pitchFamily="2" charset="0"/>
+              </a:rPr>
+              <a:t>React Context</a:t>
+            </a:r>
+            <a:r>
+              <a:rPr lang="en-GB" sz="3200" dirty="0">
+                <a:latin typeface="Quicksand" pitchFamily="2" charset="0"/>
+              </a:rPr>
+              <a:t> managed </a:t>
+            </a:r>
+            <a:r>
+              <a:rPr lang="en-GB" sz="3200" b="1" dirty="0">
                 <a:latin typeface="Quicksand" pitchFamily="2" charset="0"/>
               </a:rPr>
               <a:t>JWT Authentication</a:t>
             </a:r>
             <a:r>
-              <a:rPr lang="en-GB" sz="2800" dirty="0">
-                <a:latin typeface="Quicksand" pitchFamily="2" charset="0"/>
-              </a:rPr>
-              <a:t>, handled by a </a:t>
-            </a:r>
-            <a:r>
-              <a:rPr lang="en-GB" sz="2800" b="1" dirty="0">
-                <a:latin typeface="Quicksand" pitchFamily="2" charset="0"/>
-              </a:rPr>
-              <a:t>React Context Hook</a:t>
-            </a:r>
-            <a:r>
-              <a:rPr lang="en-GB" sz="2800" dirty="0">
-                <a:latin typeface="Quicksand" pitchFamily="2" charset="0"/>
-              </a:rPr>
-              <a:t> and persisted in local storage. The hook injects the </a:t>
-            </a:r>
-            <a:r>
-              <a:rPr lang="en-GB" sz="2800" b="1" dirty="0">
-                <a:latin typeface="Quicksand" pitchFamily="2" charset="0"/>
-              </a:rPr>
-              <a:t>authentication header</a:t>
-            </a:r>
-            <a:r>
-              <a:rPr lang="en-GB" sz="2800" dirty="0">
-                <a:latin typeface="Quicksand" pitchFamily="2" charset="0"/>
-              </a:rPr>
-              <a:t> into any </a:t>
-            </a:r>
-            <a:r>
-              <a:rPr lang="en-GB" sz="2800" b="1" dirty="0">
-                <a:latin typeface="Quicksand" pitchFamily="2" charset="0"/>
-              </a:rPr>
-              <a:t>API request</a:t>
-            </a:r>
-            <a:r>
-              <a:rPr lang="en-GB" sz="2800" dirty="0">
-                <a:latin typeface="Quicksand" pitchFamily="2" charset="0"/>
-              </a:rPr>
-              <a:t>, and the </a:t>
-            </a:r>
-            <a:r>
-              <a:rPr lang="en-GB" sz="2800" b="1" dirty="0">
-                <a:latin typeface="Quicksand" pitchFamily="2" charset="0"/>
-              </a:rPr>
-              <a:t>middleware</a:t>
-            </a:r>
-            <a:r>
-              <a:rPr lang="en-GB" sz="2800" dirty="0">
-                <a:latin typeface="Quicksand" pitchFamily="2" charset="0"/>
-              </a:rPr>
-              <a:t> blocks any request with a missing or invalid token. This is bolstered by an </a:t>
-            </a:r>
-            <a:r>
-              <a:rPr lang="en-GB" sz="2800" b="1" dirty="0">
-                <a:latin typeface="Quicksand" pitchFamily="2" charset="0"/>
-              </a:rPr>
-              <a:t>API-first Security</a:t>
-            </a:r>
-            <a:r>
-              <a:rPr lang="en-GB" sz="2800" dirty="0">
-                <a:latin typeface="Quicksand" pitchFamily="2" charset="0"/>
-              </a:rPr>
-              <a:t> architecture, with the Express backend stripping PII from the return values during the data serialisation phase, evaluated by the </a:t>
-            </a:r>
-            <a:r>
-              <a:rPr lang="en-GB" sz="2800" b="1" dirty="0">
-                <a:latin typeface="Quicksand" pitchFamily="2" charset="0"/>
-              </a:rPr>
-              <a:t>Role Based Access Control</a:t>
-            </a:r>
-            <a:r>
-              <a:rPr lang="en-GB" sz="2800" dirty="0">
-                <a:latin typeface="Quicksand" pitchFamily="2" charset="0"/>
-              </a:rPr>
-              <a:t> permission level of the requestor.</a:t>
-            </a:r>
-          </a:p>
-          <a:p>
-            <a:pPr algn="ctr"/>
-            <a:endParaRPr lang="en-GB" sz="2800" dirty="0">
+              <a:rPr lang="en-GB" sz="3200" dirty="0">
+                <a:latin typeface="Quicksand" pitchFamily="2" charset="0"/>
+              </a:rPr>
+              <a:t> ensures API requests are validated by </a:t>
+            </a:r>
+            <a:r>
+              <a:rPr lang="en-GB" sz="3200" b="1" dirty="0">
+                <a:latin typeface="Quicksand" pitchFamily="2" charset="0"/>
+              </a:rPr>
+              <a:t>Express.js middleware</a:t>
+            </a:r>
+            <a:r>
+              <a:rPr lang="en-GB" sz="3200" dirty="0">
+                <a:latin typeface="Quicksand" pitchFamily="2" charset="0"/>
+              </a:rPr>
+              <a:t> before any data is processed or returned.</a:t>
+            </a:r>
+            <a:endParaRPr lang="en-GB" sz="3200" b="1" dirty="0">
               <a:latin typeface="Quicksand" pitchFamily="2" charset="0"/>
             </a:endParaRPr>
           </a:p>
           <a:p>
             <a:pPr algn="ctr"/>
-            <a:r>
-              <a:rPr lang="en-GB" sz="2800" dirty="0">
-                <a:latin typeface="Quicksand" pitchFamily="2" charset="0"/>
-              </a:rPr>
-              <a:t>RBAC allows the members of a club to </a:t>
-            </a:r>
-            <a:r>
-              <a:rPr lang="en-GB" sz="2800" b="1" dirty="0">
-                <a:latin typeface="Quicksand" pitchFamily="2" charset="0"/>
-              </a:rPr>
-              <a:t>securely manage and own their own data profiles</a:t>
-            </a:r>
-            <a:r>
-              <a:rPr lang="en-GB" sz="2800" dirty="0">
-                <a:latin typeface="Quicksand" pitchFamily="2" charset="0"/>
-              </a:rPr>
-              <a:t>, whilst club officer roles giving volunteers access to </a:t>
-            </a:r>
-            <a:r>
-              <a:rPr lang="en-GB" sz="2800" b="1" dirty="0">
-                <a:latin typeface="Quicksand" pitchFamily="2" charset="0"/>
-              </a:rPr>
-              <a:t>specialised features</a:t>
-            </a:r>
-            <a:r>
-              <a:rPr lang="en-GB" sz="2800" dirty="0">
-                <a:latin typeface="Quicksand" pitchFamily="2" charset="0"/>
-              </a:rPr>
-              <a:t> which allow them to perform the duties of their role; Records Officers can </a:t>
-            </a:r>
-            <a:r>
-              <a:rPr lang="en-GB" sz="2800" b="1" dirty="0">
-                <a:latin typeface="Quicksand" pitchFamily="2" charset="0"/>
-              </a:rPr>
-              <a:t>manage scores</a:t>
-            </a:r>
-            <a:r>
-              <a:rPr lang="en-GB" sz="2800" dirty="0">
-                <a:latin typeface="Quicksand" pitchFamily="2" charset="0"/>
-              </a:rPr>
-              <a:t>, Admins can </a:t>
-            </a:r>
-            <a:r>
-              <a:rPr lang="en-GB" sz="2800" b="1" dirty="0">
-                <a:latin typeface="Quicksand" pitchFamily="2" charset="0"/>
-              </a:rPr>
-              <a:t>validate memberships</a:t>
-            </a:r>
-            <a:r>
-              <a:rPr lang="en-GB" sz="2800" dirty="0">
-                <a:latin typeface="Quicksand" pitchFamily="2" charset="0"/>
-              </a:rPr>
-              <a:t>, coaches can track journals that an archer keeps for </a:t>
-            </a:r>
-            <a:r>
-              <a:rPr lang="en-GB" sz="2800" b="1" dirty="0">
-                <a:latin typeface="Quicksand" pitchFamily="2" charset="0"/>
-              </a:rPr>
-              <a:t>performance metrics</a:t>
-            </a:r>
-            <a:r>
-              <a:rPr lang="en-GB" sz="2800" dirty="0">
-                <a:latin typeface="Quicksand" pitchFamily="2" charset="0"/>
-              </a:rPr>
-              <a:t>.</a:t>
-            </a:r>
-          </a:p>
-          <a:p>
-            <a:pPr algn="ctr"/>
-            <a:endParaRPr lang="en-GB" sz="2800" dirty="0">
+            <a:endParaRPr lang="en-GB" sz="3200" b="1" dirty="0">
               <a:latin typeface="Quicksand" pitchFamily="2" charset="0"/>
             </a:endParaRPr>
           </a:p>
           <a:p>
             <a:pPr algn="ctr"/>
             <a:r>
-              <a:rPr lang="en-GB" sz="2800" dirty="0">
-                <a:latin typeface="Quicksand" pitchFamily="2" charset="0"/>
-              </a:rPr>
-              <a:t>Data is further shielded by the </a:t>
-            </a:r>
-            <a:r>
-              <a:rPr lang="en-GB" sz="2800" b="1" dirty="0">
-                <a:latin typeface="Quicksand" pitchFamily="2" charset="0"/>
-              </a:rPr>
-              <a:t>Dockerised</a:t>
-            </a:r>
-            <a:r>
-              <a:rPr lang="en-GB" sz="2800" dirty="0">
-                <a:latin typeface="Quicksand" pitchFamily="2" charset="0"/>
-              </a:rPr>
-              <a:t> infrastructure, hosting the PostgreSQL database alongside the microservices on an </a:t>
-            </a:r>
-            <a:r>
-              <a:rPr lang="en-GB" sz="2800" b="1" dirty="0">
-                <a:latin typeface="Quicksand" pitchFamily="2" charset="0"/>
-              </a:rPr>
-              <a:t>isolated virtual bridge network</a:t>
-            </a:r>
-            <a:r>
-              <a:rPr lang="en-GB" sz="2800" dirty="0">
-                <a:latin typeface="Quicksand" pitchFamily="2" charset="0"/>
-              </a:rPr>
-              <a:t>, keeping sensitive data traffic internal on the server on a closed loop, off of the public internet during calculations.</a:t>
-            </a:r>
+              <a:rPr lang="en-GB" sz="3200" b="1" dirty="0">
+                <a:latin typeface="Quicksand" pitchFamily="2" charset="0"/>
+              </a:rPr>
+              <a:t>Role-Based Access Control</a:t>
+            </a:r>
+            <a:r>
+              <a:rPr lang="en-GB" sz="3200" dirty="0">
+                <a:latin typeface="Quicksand" pitchFamily="2" charset="0"/>
+              </a:rPr>
+              <a:t> offers granular permissions, restricting data visibility on the </a:t>
+            </a:r>
+            <a:r>
+              <a:rPr lang="en-GB" sz="3200" b="1" dirty="0">
+                <a:latin typeface="Quicksand" pitchFamily="2" charset="0"/>
+              </a:rPr>
+              <a:t>Principle of Least Privilege</a:t>
+            </a:r>
+            <a:r>
+              <a:rPr lang="en-GB" sz="3200" dirty="0">
+                <a:latin typeface="Quicksand" pitchFamily="2" charset="0"/>
+              </a:rPr>
+              <a:t>.</a:t>
+            </a:r>
+          </a:p>
+          <a:p>
+            <a:pPr algn="ctr"/>
+            <a:endParaRPr lang="en-GB" sz="3200" dirty="0">
+              <a:latin typeface="Quicksand" pitchFamily="2" charset="0"/>
+            </a:endParaRPr>
+          </a:p>
+          <a:p>
+            <a:pPr algn="ctr"/>
+            <a:r>
+              <a:rPr lang="en-GB" sz="3200" dirty="0">
+                <a:latin typeface="Quicksand" pitchFamily="2" charset="0"/>
+              </a:rPr>
+              <a:t>An </a:t>
+            </a:r>
+            <a:r>
+              <a:rPr lang="en-GB" sz="3200" b="1" dirty="0">
+                <a:latin typeface="Quicksand" pitchFamily="2" charset="0"/>
+              </a:rPr>
+              <a:t>AWS Virtual Private Cloud</a:t>
+            </a:r>
+            <a:r>
+              <a:rPr lang="en-GB" sz="3200" dirty="0">
+                <a:latin typeface="Quicksand" pitchFamily="2" charset="0"/>
+              </a:rPr>
+              <a:t> shields the database and Flask microservice from the public internet. </a:t>
+            </a:r>
+            <a:r>
+              <a:rPr lang="en-GB" sz="3200" b="1" dirty="0">
+                <a:latin typeface="Quicksand" pitchFamily="2" charset="0"/>
+              </a:rPr>
+              <a:t>Amazon CloudFront</a:t>
+            </a:r>
+            <a:r>
+              <a:rPr lang="en-GB" sz="3200" dirty="0">
+                <a:latin typeface="Quicksand" pitchFamily="2" charset="0"/>
+              </a:rPr>
+              <a:t> provides a single entry-point for external traffic, serving static </a:t>
+            </a:r>
+            <a:r>
+              <a:rPr lang="en-GB" sz="3200" b="1" dirty="0">
+                <a:latin typeface="Quicksand" pitchFamily="2" charset="0"/>
+              </a:rPr>
+              <a:t>S3</a:t>
+            </a:r>
+            <a:r>
+              <a:rPr lang="en-GB" sz="3200" dirty="0">
+                <a:latin typeface="Quicksand" pitchFamily="2" charset="0"/>
+              </a:rPr>
+              <a:t> content and routing API traffic to an </a:t>
+            </a:r>
+            <a:r>
+              <a:rPr lang="en-GB" sz="3200" b="1" dirty="0">
+                <a:latin typeface="Quicksand" pitchFamily="2" charset="0"/>
+              </a:rPr>
+              <a:t>ECS Cluster</a:t>
+            </a:r>
+            <a:r>
+              <a:rPr lang="en-GB" sz="3200" dirty="0">
+                <a:latin typeface="Quicksand" pitchFamily="2" charset="0"/>
+              </a:rPr>
+              <a:t>, spanning across </a:t>
+            </a:r>
+            <a:r>
+              <a:rPr lang="en-GB" sz="3200" b="1" dirty="0">
+                <a:latin typeface="Quicksand" pitchFamily="2" charset="0"/>
+              </a:rPr>
+              <a:t>three Availability Zones</a:t>
+            </a:r>
+            <a:r>
+              <a:rPr lang="en-GB" sz="3200" dirty="0">
+                <a:latin typeface="Quicksand" pitchFamily="2" charset="0"/>
+              </a:rPr>
+              <a:t>.</a:t>
+            </a:r>
+          </a:p>
+          <a:p>
+            <a:pPr algn="ctr"/>
+            <a:endParaRPr lang="en-GB" sz="3200" dirty="0">
+              <a:latin typeface="Quicksand" pitchFamily="2" charset="0"/>
+            </a:endParaRPr>
+          </a:p>
+          <a:p>
+            <a:pPr algn="ctr"/>
+            <a:r>
+              <a:rPr lang="en-GB" sz="3200" dirty="0">
+                <a:latin typeface="Quicksand" pitchFamily="2" charset="0"/>
+              </a:rPr>
+              <a:t>The system was built on </a:t>
+            </a:r>
+            <a:r>
+              <a:rPr lang="en-GB" sz="3200" b="1" dirty="0">
+                <a:latin typeface="Quicksand" pitchFamily="2" charset="0"/>
+              </a:rPr>
+              <a:t>PostgreSQL</a:t>
+            </a:r>
+            <a:r>
+              <a:rPr lang="en-GB" sz="3200" dirty="0">
+                <a:latin typeface="Quicksand" pitchFamily="2" charset="0"/>
+              </a:rPr>
+              <a:t>, </a:t>
+            </a:r>
+            <a:r>
+              <a:rPr lang="en-GB" sz="3200" b="1" dirty="0">
+                <a:latin typeface="Quicksand" pitchFamily="2" charset="0"/>
+              </a:rPr>
+              <a:t>Express.js</a:t>
+            </a:r>
+            <a:r>
+              <a:rPr lang="en-GB" sz="3200" dirty="0">
+                <a:latin typeface="Quicksand" pitchFamily="2" charset="0"/>
+              </a:rPr>
+              <a:t>, </a:t>
+            </a:r>
+            <a:r>
+              <a:rPr lang="en-GB" sz="3200" b="1" dirty="0">
+                <a:latin typeface="Quicksand" pitchFamily="2" charset="0"/>
+              </a:rPr>
+              <a:t>React</a:t>
+            </a:r>
+            <a:r>
+              <a:rPr lang="en-GB" sz="3200" dirty="0">
+                <a:latin typeface="Quicksand" pitchFamily="2" charset="0"/>
+              </a:rPr>
+              <a:t> and </a:t>
+            </a:r>
+            <a:r>
+              <a:rPr lang="en-GB" sz="3200" b="1" dirty="0">
+                <a:latin typeface="Quicksand" pitchFamily="2" charset="0"/>
+              </a:rPr>
+              <a:t>Node.js</a:t>
+            </a:r>
+            <a:r>
+              <a:rPr lang="en-GB" sz="3200" dirty="0">
+                <a:latin typeface="Quicksand" pitchFamily="2" charset="0"/>
+              </a:rPr>
+              <a:t> to provide a modern full-stack foundation, leveraging </a:t>
+            </a:r>
+            <a:r>
+              <a:rPr lang="en-GB" sz="3200" b="1" dirty="0">
+                <a:latin typeface="Quicksand" pitchFamily="2" charset="0"/>
+              </a:rPr>
+              <a:t>Prisma ORM</a:t>
+            </a:r>
+            <a:r>
+              <a:rPr lang="en-GB" sz="3200" dirty="0">
+                <a:latin typeface="Quicksand" pitchFamily="2" charset="0"/>
+              </a:rPr>
+              <a:t> for type-safe data access.</a:t>
+            </a:r>
+          </a:p>
+          <a:p>
+            <a:pPr algn="ctr"/>
+            <a:endParaRPr lang="en-GB" sz="3200" dirty="0">
+              <a:latin typeface="Quicksand" pitchFamily="2" charset="0"/>
+            </a:endParaRPr>
+          </a:p>
+          <a:p>
+            <a:pPr algn="ctr"/>
+            <a:r>
+              <a:rPr lang="en-GB" sz="3200" dirty="0">
+                <a:latin typeface="Quicksand" pitchFamily="2" charset="0"/>
+              </a:rPr>
+              <a:t>Decoupled </a:t>
+            </a:r>
+            <a:r>
+              <a:rPr lang="en-GB" sz="3200" b="1" dirty="0">
+                <a:latin typeface="Quicksand" pitchFamily="2" charset="0"/>
+              </a:rPr>
+              <a:t>Express.js</a:t>
+            </a:r>
+            <a:r>
+              <a:rPr lang="en-GB" sz="3200" dirty="0">
+                <a:latin typeface="Quicksand" pitchFamily="2" charset="0"/>
+              </a:rPr>
+              <a:t> and </a:t>
+            </a:r>
+            <a:r>
+              <a:rPr lang="en-GB" sz="3200" b="1" dirty="0">
+                <a:latin typeface="Quicksand" pitchFamily="2" charset="0"/>
+              </a:rPr>
+              <a:t>Flask</a:t>
+            </a:r>
+            <a:r>
+              <a:rPr lang="en-GB" sz="3200" dirty="0">
+                <a:latin typeface="Quicksand" pitchFamily="2" charset="0"/>
+              </a:rPr>
+              <a:t> microservices communicate over a secure, private bridge network, via </a:t>
+            </a:r>
+            <a:r>
+              <a:rPr lang="en-GB" sz="3200" b="1" dirty="0">
+                <a:latin typeface="Quicksand" pitchFamily="2" charset="0"/>
+              </a:rPr>
+              <a:t>AWS Cloud.</a:t>
+            </a:r>
+            <a:endParaRPr lang="en-GB" sz="3200" dirty="0">
+              <a:latin typeface="Quicksand" pitchFamily="2" charset="0"/>
+            </a:endParaRPr>
           </a:p>
         </p:txBody>
       </p:sp>
@@ -4265,172 +4330,14 @@
         </p:blipFill>
         <p:spPr>
           <a:xfrm>
-            <a:off x="14520322" y="15745308"/>
-            <a:ext cx="4035852" cy="4035852"/>
+            <a:off x="21594635" y="16125683"/>
+            <a:ext cx="3253628" cy="3253628"/>
           </a:xfrm>
           <a:prstGeom prst="rect">
             <a:avLst/>
           </a:prstGeom>
         </p:spPr>
       </p:pic>
-      <p:pic>
-        <p:nvPicPr>
-          <p:cNvPr id="26" name="Picture 25">
-            <a:extLst>
-              <a:ext uri="{FF2B5EF4-FFF2-40B4-BE49-F238E27FC236}">
-                <a16:creationId xmlns:a16="http://schemas.microsoft.com/office/drawing/2014/main" id="{FB8610EF-FA00-9316-395A-7528362D3A78}"/>
-              </a:ext>
-            </a:extLst>
-          </p:cNvPr>
-          <p:cNvPicPr>
-            <a:picLocks noChangeAspect="1"/>
-          </p:cNvPicPr>
-          <p:nvPr/>
-        </p:nvPicPr>
-        <p:blipFill>
-          <a:blip r:embed="rId10"/>
-          <a:stretch>
-            <a:fillRect/>
-          </a:stretch>
-        </p:blipFill>
-        <p:spPr>
-          <a:xfrm>
-            <a:off x="1749043" y="10971284"/>
-            <a:ext cx="7747853" cy="6324778"/>
-          </a:xfrm>
-          <a:prstGeom prst="rect">
-            <a:avLst/>
-          </a:prstGeom>
-        </p:spPr>
-      </p:pic>
-      <p:pic>
-        <p:nvPicPr>
-          <p:cNvPr id="28" name="Picture 27">
-            <a:extLst>
-              <a:ext uri="{FF2B5EF4-FFF2-40B4-BE49-F238E27FC236}">
-                <a16:creationId xmlns:a16="http://schemas.microsoft.com/office/drawing/2014/main" id="{8240C629-431B-F115-F4C1-97DBBC5C1A7D}"/>
-              </a:ext>
-            </a:extLst>
-          </p:cNvPr>
-          <p:cNvPicPr>
-            <a:picLocks noChangeAspect="1"/>
-          </p:cNvPicPr>
-          <p:nvPr/>
-        </p:nvPicPr>
-        <p:blipFill>
-          <a:blip r:embed="rId11"/>
-          <a:stretch>
-            <a:fillRect/>
-          </a:stretch>
-        </p:blipFill>
-        <p:spPr>
-          <a:xfrm>
-            <a:off x="20907117" y="4405240"/>
-            <a:ext cx="7490241" cy="7546718"/>
-          </a:xfrm>
-          <a:prstGeom prst="rect">
-            <a:avLst/>
-          </a:prstGeom>
-        </p:spPr>
-      </p:pic>
-      <p:sp>
-        <p:nvSpPr>
-          <p:cNvPr id="29" name="TextBox 28">
-            <a:extLst>
-              <a:ext uri="{FF2B5EF4-FFF2-40B4-BE49-F238E27FC236}">
-                <a16:creationId xmlns:a16="http://schemas.microsoft.com/office/drawing/2014/main" id="{7739C2D0-FBEF-CE04-9EA2-558CA090EB31}"/>
-              </a:ext>
-            </a:extLst>
-          </p:cNvPr>
-          <p:cNvSpPr txBox="1"/>
-          <p:nvPr/>
-        </p:nvSpPr>
-        <p:spPr>
-          <a:xfrm>
-            <a:off x="20539317" y="12579401"/>
-            <a:ext cx="8225840" cy="3539430"/>
-          </a:xfrm>
-          <a:prstGeom prst="rect">
-            <a:avLst/>
-          </a:prstGeom>
-          <a:noFill/>
-        </p:spPr>
-        <p:txBody>
-          <a:bodyPr wrap="square" rtlCol="0">
-            <a:spAutoFit/>
-          </a:bodyPr>
-          <a:lstStyle/>
-          <a:p>
-            <a:pPr algn="ctr"/>
-            <a:r>
-              <a:rPr lang="en-GB" sz="2800" dirty="0">
-                <a:latin typeface="Quicksand" pitchFamily="2" charset="0"/>
-              </a:rPr>
-              <a:t>The system utilises a full-stack </a:t>
-            </a:r>
-            <a:r>
-              <a:rPr lang="en-GB" sz="2800" b="1" dirty="0">
-                <a:latin typeface="Quicksand" pitchFamily="2" charset="0"/>
-              </a:rPr>
-              <a:t>PERN</a:t>
-            </a:r>
-            <a:r>
-              <a:rPr lang="en-GB" sz="2800" dirty="0">
-                <a:latin typeface="Quicksand" pitchFamily="2" charset="0"/>
-              </a:rPr>
-              <a:t> based architecture, using the </a:t>
-            </a:r>
-            <a:r>
-              <a:rPr lang="en-GB" sz="2800" b="1" dirty="0">
-                <a:latin typeface="Quicksand" pitchFamily="2" charset="0"/>
-              </a:rPr>
-              <a:t>Prisma ORM</a:t>
-            </a:r>
-            <a:r>
-              <a:rPr lang="en-GB" sz="2800" dirty="0">
-                <a:latin typeface="Quicksand" pitchFamily="2" charset="0"/>
-              </a:rPr>
-              <a:t> for type-safe data models. </a:t>
-            </a:r>
-            <a:r>
-              <a:rPr lang="en-GB" sz="2800" b="1" dirty="0">
-                <a:latin typeface="Quicksand" pitchFamily="2" charset="0"/>
-              </a:rPr>
-              <a:t>Docker</a:t>
-            </a:r>
-            <a:r>
-              <a:rPr lang="en-GB" sz="2800" dirty="0">
-                <a:latin typeface="Quicksand" pitchFamily="2" charset="0"/>
-              </a:rPr>
-              <a:t> is used to containerise and orchestrate communications between the frontend, backend, database and a </a:t>
-            </a:r>
-            <a:r>
-              <a:rPr lang="en-GB" sz="2800" b="1" dirty="0">
-                <a:latin typeface="Quicksand" pitchFamily="2" charset="0"/>
-              </a:rPr>
-              <a:t>Python Flask</a:t>
-            </a:r>
-            <a:r>
-              <a:rPr lang="en-GB" sz="2800" dirty="0">
-                <a:latin typeface="Quicksand" pitchFamily="2" charset="0"/>
-              </a:rPr>
-              <a:t> microservice container, running the </a:t>
-            </a:r>
-            <a:r>
-              <a:rPr lang="en-GB" sz="2800" b="1" dirty="0">
-                <a:latin typeface="Quicksand" pitchFamily="2" charset="0"/>
-              </a:rPr>
-              <a:t>archeryutils</a:t>
-            </a:r>
-            <a:r>
-              <a:rPr lang="en-GB" sz="2800" dirty="0">
-                <a:latin typeface="Quicksand" pitchFamily="2" charset="0"/>
-              </a:rPr>
-              <a:t> library to handle the automated classification assignments and handicapping.</a:t>
-            </a:r>
-          </a:p>
-        </p:txBody>
-      </p:sp>
       <p:pic>
         <p:nvPicPr>
           <p:cNvPr id="1028" name="Picture 4">
@@ -4446,7 +4353,7 @@
           <p:nvPr/>
         </p:nvPicPr>
         <p:blipFill>
-          <a:blip r:embed="rId12">
+          <a:blip r:embed="rId10">
             <a:extLst>
               <a:ext uri="{28A0092B-C50C-407E-A947-70E740481C1C}">
                 <a14:useLocalDpi xmlns:a14="http://schemas.microsoft.com/office/drawing/2010/main" val="0"/>
@@ -4478,6 +4385,131 @@
           </a:extLst>
         </p:spPr>
       </p:pic>
+      <p:pic>
+        <p:nvPicPr>
+          <p:cNvPr id="6" name="Picture 5">
+            <a:extLst>
+              <a:ext uri="{FF2B5EF4-FFF2-40B4-BE49-F238E27FC236}">
+                <a16:creationId xmlns:a16="http://schemas.microsoft.com/office/drawing/2014/main" id="{CD646267-9C60-EEC9-38A2-BF1DA34C9066}"/>
+              </a:ext>
+            </a:extLst>
+          </p:cNvPr>
+          <p:cNvPicPr>
+            <a:picLocks noChangeAspect="1"/>
+          </p:cNvPicPr>
+          <p:nvPr/>
+        </p:nvPicPr>
+        <p:blipFill>
+          <a:blip r:embed="rId11">
+            <a:extLst>
+              <a:ext uri="{28A0092B-C50C-407E-A947-70E740481C1C}">
+                <a14:useLocalDpi xmlns:a14="http://schemas.microsoft.com/office/drawing/2010/main" val="0"/>
+              </a:ext>
+            </a:extLst>
+          </a:blip>
+          <a:stretch>
+            <a:fillRect/>
+          </a:stretch>
+        </p:blipFill>
+        <p:spPr>
+          <a:xfrm>
+            <a:off x="14414906" y="16836167"/>
+            <a:ext cx="2128510" cy="1870761"/>
+          </a:xfrm>
+          <a:prstGeom prst="rect">
+            <a:avLst/>
+          </a:prstGeom>
+        </p:spPr>
+      </p:pic>
+      <p:grpSp>
+        <p:nvGrpSpPr>
+          <p:cNvPr id="42" name="Group 41">
+            <a:extLst>
+              <a:ext uri="{FF2B5EF4-FFF2-40B4-BE49-F238E27FC236}">
+                <a16:creationId xmlns:a16="http://schemas.microsoft.com/office/drawing/2014/main" id="{7EA41903-B29A-5A05-C0EF-991E004FFF6A}"/>
+              </a:ext>
+            </a:extLst>
+          </p:cNvPr>
+          <p:cNvGrpSpPr/>
+          <p:nvPr/>
+        </p:nvGrpSpPr>
+        <p:grpSpPr>
+          <a:xfrm>
+            <a:off x="19464874" y="3559002"/>
+            <a:ext cx="9423762" cy="12093806"/>
+            <a:chOff x="19466827" y="3644765"/>
+            <a:chExt cx="9423762" cy="12093806"/>
+          </a:xfrm>
+        </p:grpSpPr>
+        <p:pic>
+          <p:nvPicPr>
+            <p:cNvPr id="33" name="Picture 32">
+              <a:extLst>
+                <a:ext uri="{FF2B5EF4-FFF2-40B4-BE49-F238E27FC236}">
+                  <a16:creationId xmlns:a16="http://schemas.microsoft.com/office/drawing/2014/main" id="{A04ECBC5-9B62-3003-379A-B14A86A2DDE2}"/>
+                </a:ext>
+              </a:extLst>
+            </p:cNvPr>
+            <p:cNvPicPr>
+              <a:picLocks noChangeAspect="1"/>
+            </p:cNvPicPr>
+            <p:nvPr/>
+          </p:nvPicPr>
+          <p:blipFill>
+            <a:blip r:embed="rId12"/>
+            <a:stretch>
+              <a:fillRect/>
+            </a:stretch>
+          </p:blipFill>
+          <p:spPr>
+            <a:xfrm>
+              <a:off x="19470874" y="3644765"/>
+              <a:ext cx="9419715" cy="11107640"/>
+            </a:xfrm>
+            <a:prstGeom prst="rect">
+              <a:avLst/>
+            </a:prstGeom>
+          </p:spPr>
+        </p:pic>
+        <p:sp>
+          <p:nvSpPr>
+            <p:cNvPr id="34" name="TextBox 33">
+              <a:extLst>
+                <a:ext uri="{FF2B5EF4-FFF2-40B4-BE49-F238E27FC236}">
+                  <a16:creationId xmlns:a16="http://schemas.microsoft.com/office/drawing/2014/main" id="{F60180E7-6B8A-F34A-FBB5-F9F58B7747CB}"/>
+                </a:ext>
+              </a:extLst>
+            </p:cNvPr>
+            <p:cNvSpPr txBox="1"/>
+            <p:nvPr/>
+          </p:nvSpPr>
+          <p:spPr>
+            <a:xfrm>
+              <a:off x="19466827" y="15153796"/>
+              <a:ext cx="9419715" cy="584775"/>
+            </a:xfrm>
+            <a:prstGeom prst="rect">
+              <a:avLst/>
+            </a:prstGeom>
+            <a:noFill/>
+          </p:spPr>
+          <p:txBody>
+            <a:bodyPr wrap="square" rtlCol="0">
+              <a:spAutoFit/>
+            </a:bodyPr>
+            <a:lstStyle/>
+            <a:p>
+              <a:pPr algn="ctr"/>
+              <a:r>
+                <a:rPr lang="en-GB" sz="3200" b="1" dirty="0">
+                  <a:latin typeface="Quicksand" pitchFamily="2" charset="0"/>
+                </a:rPr>
+                <a:t>https://www.archeryscorekeeper.co.uk</a:t>
+              </a:r>
+            </a:p>
+          </p:txBody>
+        </p:sp>
+      </p:grpSp>
     </p:spTree>
     <p:extLst>
       <p:ext uri="{BB962C8B-B14F-4D97-AF65-F5344CB8AC3E}">
@@ -5057,6 +5089,48 @@
 </file>
 
 <file path=customXml/item2.xml><?xml version="1.0" encoding="utf-8"?>
+<p:properties xmlns:p="http://schemas.microsoft.com/office/2006/metadata/properties" xmlns:xsi="http://www.w3.org/2001/XMLSchema-instance" xmlns:pc="http://schemas.microsoft.com/office/infopath/2007/PartnerControls">
+  <documentManagement>
+    <NotebookType xmlns="dc781de3-bafc-4db7-a392-5d8a9e9bc0f5" xsi:nil="true"/>
+    <Invited_Students xmlns="dc781de3-bafc-4db7-a392-5d8a9e9bc0f5" xsi:nil="true"/>
+    <FolderType xmlns="dc781de3-bafc-4db7-a392-5d8a9e9bc0f5" xsi:nil="true"/>
+    <Owner xmlns="dc781de3-bafc-4db7-a392-5d8a9e9bc0f5">
+      <UserInfo>
+        <DisplayName/>
+        <AccountId xsi:nil="true"/>
+        <AccountType/>
+      </UserInfo>
+    </Owner>
+    <AppVersion xmlns="dc781de3-bafc-4db7-a392-5d8a9e9bc0f5" xsi:nil="true"/>
+    <DefaultSectionNames xmlns="dc781de3-bafc-4db7-a392-5d8a9e9bc0f5" xsi:nil="true"/>
+    <Teachers xmlns="dc781de3-bafc-4db7-a392-5d8a9e9bc0f5">
+      <UserInfo>
+        <DisplayName/>
+        <AccountId xsi:nil="true"/>
+        <AccountType/>
+      </UserInfo>
+    </Teachers>
+    <Students xmlns="dc781de3-bafc-4db7-a392-5d8a9e9bc0f5">
+      <UserInfo>
+        <DisplayName/>
+        <AccountId xsi:nil="true"/>
+        <AccountType/>
+      </UserInfo>
+    </Students>
+    <Student_Groups xmlns="dc781de3-bafc-4db7-a392-5d8a9e9bc0f5">
+      <UserInfo>
+        <DisplayName/>
+        <AccountId xsi:nil="true"/>
+        <AccountType/>
+      </UserInfo>
+    </Student_Groups>
+    <Invited_Teachers xmlns="dc781de3-bafc-4db7-a392-5d8a9e9bc0f5" xsi:nil="true"/>
+    <Self_Registration_Enabled xmlns="dc781de3-bafc-4db7-a392-5d8a9e9bc0f5" xsi:nil="true"/>
+  </documentManagement>
+</p:properties>
+</file>
+
+<file path=customXml/item3.xml><?xml version="1.0" encoding="utf-8"?>
 <ct:contentTypeSchema xmlns:ct="http://schemas.microsoft.com/office/2006/metadata/contentType" xmlns:ma="http://schemas.microsoft.com/office/2006/metadata/properties/metaAttributes" ct:_="" ma:_="" ma:contentTypeName="Document" ma:contentTypeID="0x010100183530F9ADBD1D48AC3974C37B1F16E8" ma:contentTypeVersion="24" ma:contentTypeDescription="Create a new document." ma:contentTypeScope="" ma:versionID="70394ba201040ca3d815e3c4f7012274">
   <xsd:schema xmlns:xsd="http://www.w3.org/2001/XMLSchema" xmlns:xs="http://www.w3.org/2001/XMLSchema" xmlns:p="http://schemas.microsoft.com/office/2006/metadata/properties" xmlns:ns3="72339acb-e8cc-4142-9dab-9dca3e7dada8" xmlns:ns4="dc781de3-bafc-4db7-a392-5d8a9e9bc0f5" targetNamespace="http://schemas.microsoft.com/office/2006/metadata/properties" ma:root="true" ma:fieldsID="d0d4fd1207dbf170f06c018f7c6b1e9a" ns3:_="" ns4:_="">
     <xsd:import namespace="72339acb-e8cc-4142-9dab-9dca3e7dada8"/>
@@ -5407,48 +5481,6 @@
 </ct:contentTypeSchema>
 </file>
 
-<file path=customXml/item3.xml><?xml version="1.0" encoding="utf-8"?>
-<p:properties xmlns:p="http://schemas.microsoft.com/office/2006/metadata/properties" xmlns:xsi="http://www.w3.org/2001/XMLSchema-instance" xmlns:pc="http://schemas.microsoft.com/office/infopath/2007/PartnerControls">
-  <documentManagement>
-    <NotebookType xmlns="dc781de3-bafc-4db7-a392-5d8a9e9bc0f5" xsi:nil="true"/>
-    <Invited_Students xmlns="dc781de3-bafc-4db7-a392-5d8a9e9bc0f5" xsi:nil="true"/>
-    <FolderType xmlns="dc781de3-bafc-4db7-a392-5d8a9e9bc0f5" xsi:nil="true"/>
-    <Owner xmlns="dc781de3-bafc-4db7-a392-5d8a9e9bc0f5">
-      <UserInfo>
-        <DisplayName/>
-        <AccountId xsi:nil="true"/>
-        <AccountType/>
-      </UserInfo>
-    </Owner>
-    <AppVersion xmlns="dc781de3-bafc-4db7-a392-5d8a9e9bc0f5" xsi:nil="true"/>
-    <DefaultSectionNames xmlns="dc781de3-bafc-4db7-a392-5d8a9e9bc0f5" xsi:nil="true"/>
-    <Teachers xmlns="dc781de3-bafc-4db7-a392-5d8a9e9bc0f5">
-      <UserInfo>
-        <DisplayName/>
-        <AccountId xsi:nil="true"/>
-        <AccountType/>
-      </UserInfo>
-    </Teachers>
-    <Students xmlns="dc781de3-bafc-4db7-a392-5d8a9e9bc0f5">
-      <UserInfo>
-        <DisplayName/>
-        <AccountId xsi:nil="true"/>
-        <AccountType/>
-      </UserInfo>
-    </Students>
-    <Student_Groups xmlns="dc781de3-bafc-4db7-a392-5d8a9e9bc0f5">
-      <UserInfo>
-        <DisplayName/>
-        <AccountId xsi:nil="true"/>
-        <AccountType/>
-      </UserInfo>
-    </Student_Groups>
-    <Invited_Teachers xmlns="dc781de3-bafc-4db7-a392-5d8a9e9bc0f5" xsi:nil="true"/>
-    <Self_Registration_Enabled xmlns="dc781de3-bafc-4db7-a392-5d8a9e9bc0f5" xsi:nil="true"/>
-  </documentManagement>
-</p:properties>
-</file>
-
 <file path=customXml/itemProps1.xml><?xml version="1.0" encoding="utf-8"?>
 <ds:datastoreItem xmlns:ds="http://schemas.openxmlformats.org/officeDocument/2006/customXml" ds:itemID="{90E91343-FC66-4181-B87C-967309332136}">
   <ds:schemaRefs>
@@ -5458,6 +5490,23 @@
 </file>
 
 <file path=customXml/itemProps2.xml><?xml version="1.0" encoding="utf-8"?>
+<ds:datastoreItem xmlns:ds="http://schemas.openxmlformats.org/officeDocument/2006/customXml" ds:itemID="{48338919-CAB7-4AC9-BE2B-610C7C37C733}">
+  <ds:schemaRefs>
+    <ds:schemaRef ds:uri="http://purl.org/dc/dcmitype/"/>
+    <ds:schemaRef ds:uri="http://schemas.microsoft.com/office/infopath/2007/PartnerControls"/>
+    <ds:schemaRef ds:uri="http://purl.org/dc/elements/1.1/"/>
+    <ds:schemaRef ds:uri="http://schemas.microsoft.com/office/2006/documentManagement/types"/>
+    <ds:schemaRef ds:uri="http://purl.org/dc/terms/"/>
+    <ds:schemaRef ds:uri="http://schemas.openxmlformats.org/package/2006/metadata/core-properties"/>
+    <ds:schemaRef ds:uri="dc781de3-bafc-4db7-a392-5d8a9e9bc0f5"/>
+    <ds:schemaRef ds:uri="72339acb-e8cc-4142-9dab-9dca3e7dada8"/>
+    <ds:schemaRef ds:uri="http://schemas.microsoft.com/office/2006/metadata/properties"/>
+    <ds:schemaRef ds:uri="http://www.w3.org/XML/1998/namespace"/>
+  </ds:schemaRefs>
+</ds:datastoreItem>
+</file>
+
+<file path=customXml/itemProps3.xml><?xml version="1.0" encoding="utf-8"?>
 <ds:datastoreItem xmlns:ds="http://schemas.openxmlformats.org/officeDocument/2006/customXml" ds:itemID="{6D556809-3C50-4FFA-808E-E6B975D92521}">
   <ds:schemaRefs>
     <ds:schemaRef ds:uri="http://schemas.microsoft.com/office/2006/metadata/contentType"/>
@@ -5474,21 +5523,4 @@
     <ds:schemaRef ds:uri="http://schemas.microsoft.com/internal/obd"/>
   </ds:schemaRefs>
 </ds:datastoreItem>
-</file>
-
-<file path=customXml/itemProps3.xml><?xml version="1.0" encoding="utf-8"?>
-<ds:datastoreItem xmlns:ds="http://schemas.openxmlformats.org/officeDocument/2006/customXml" ds:itemID="{48338919-CAB7-4AC9-BE2B-610C7C37C733}">
-  <ds:schemaRefs>
-    <ds:schemaRef ds:uri="http://purl.org/dc/dcmitype/"/>
-    <ds:schemaRef ds:uri="http://schemas.microsoft.com/office/infopath/2007/PartnerControls"/>
-    <ds:schemaRef ds:uri="http://purl.org/dc/elements/1.1/"/>
-    <ds:schemaRef ds:uri="http://schemas.microsoft.com/office/2006/documentManagement/types"/>
-    <ds:schemaRef ds:uri="http://purl.org/dc/terms/"/>
-    <ds:schemaRef ds:uri="http://schemas.openxmlformats.org/package/2006/metadata/core-properties"/>
-    <ds:schemaRef ds:uri="dc781de3-bafc-4db7-a392-5d8a9e9bc0f5"/>
-    <ds:schemaRef ds:uri="72339acb-e8cc-4142-9dab-9dca3e7dada8"/>
-    <ds:schemaRef ds:uri="http://schemas.microsoft.com/office/2006/metadata/properties"/>
-    <ds:schemaRef ds:uri="http://www.w3.org/XML/1998/namespace"/>
-  </ds:schemaRefs>
-</ds:datastoreItem>
 </file>